--- a/doc/IOCFC26/forecastSegmentation.pptx
+++ b/doc/IOCFC26/forecastSegmentation.pptx
@@ -32259,7 +32259,7 @@
           <a:p>
             <a:r>
               <a:rPr lang="en-US" sz="2400" dirty="0"/>
-              <a:t>Most common use case is linear piecewise approximation, where the subseries between changepoints is approximated by best fit linear segments.</a:t>
+              <a:t>Most common use case is linear piecewise approximation, where the subseries between changepoints are approximated by best fit linear segments.</a:t>
             </a:r>
           </a:p>
           <a:p>
@@ -32503,7 +32503,7 @@
             </a:pPr>
             <a:r>
               <a:rPr lang="en-US" sz="2200" dirty="0"/>
-              <a:t>Markov-switching (latent stochastic switching rule). Markov-Switching Autoregressive model (Hamilton, 1989): regime is an unobserved discrete state following a Markov chain. Widely used for business-cycle dating (expansion vs. recession) and, in finance, for volatility regimes (e.g. Markov-switching GARCH).</a:t>
+              <a:t>Markov-switching (latent stochastic switching rule). Markov-Switching Autoregressive model (Hamilton, 1989): regime is an unobserved discrete state following a Markov chain. Used for business-cycle identification (expansion / recession) and, in finance, for volatility regimes (e.g. Markov-switching GARCH).</a:t>
             </a:r>
           </a:p>
         </p:txBody>
@@ -32796,7 +32796,7 @@
             </a:pPr>
             <a:r>
               <a:rPr lang="en-US" sz="2000" dirty="0"/>
-              <a:t>SETAR: switches deterministically between a fixed, predefined set of regimes — cannot represent structural change beyond that fixed parametric menu.</a:t>
+              <a:t>SETAR: switches deterministically between a fixed, predefined set of regimes — cannot represent structural changes beyond that fixed parametric set.</a:t>
             </a:r>
           </a:p>
           <a:p>
@@ -32809,7 +32809,7 @@
             </a:pPr>
             <a:r>
               <a:rPr lang="en-US" sz="2000" dirty="0"/>
-              <a:t>Markov-switching: regime is latent and only known probabilistically at the forecast origin; multi-step forecasts average over regimes, diluting the regime-specific dynamics the model is prized for in-sample. </a:t>
+              <a:t>Markov-switching: regime is latent and only known probabilistically at the forecast origin; multi-step forecasts average over regimes, diluting the regime-specific dynamics of interest for in-sample analysis. </a:t>
             </a:r>
           </a:p>
           <a:p>
@@ -33041,8 +33041,8 @@
           <a:chExt cx="0" cy="0"/>
         </a:xfrm>
       </p:grpSpPr>
-      <mc:AlternateContent xmlns:mc="http://schemas.openxmlformats.org/markup-compatibility/2006">
-        <mc:Choice xmlns:a14="http://schemas.microsoft.com/office/drawing/2010/main" Requires="a14">
+      <mc:AlternateContent xmlns:mc="http://schemas.openxmlformats.org/markup-compatibility/2006" xmlns:a14="http://schemas.microsoft.com/office/drawing/2010/main">
+        <mc:Choice Requires="a14">
           <p:sp>
             <p:nvSpPr>
               <p:cNvPr id="2" name="Content Placeholder 1">
@@ -33342,8 +33342,8 @@
                         <m:chr m:val="∑"/>
                         <m:supHide m:val="on"/>
                         <m:ctrlPr>
-                          <a:rPr lang="en-US" sz="2400" smtClean="0">
-                            <a:latin typeface="Cambria" panose="02040503050406030204" pitchFamily="18" charset="0"/>
+                          <a:rPr lang="en-US" sz="2400" i="1" smtClean="0">
+                            <a:latin typeface="Cambria Math" panose="02040503050406030204" pitchFamily="18" charset="0"/>
                             <a:ea typeface="Cambria" panose="02040503050406030204" pitchFamily="18" charset="0"/>
                           </a:rPr>
                         </m:ctrlPr>
@@ -33351,7 +33351,7 @@
                       <m:sub>
                         <m:r>
                           <a:rPr lang="en-US" sz="2400" smtClean="0">
-                            <a:latin typeface="Cambria" panose="02040503050406030204" pitchFamily="18" charset="0"/>
+                            <a:latin typeface="Cambria Math" panose="02040503050406030204" pitchFamily="18" charset="0"/>
                             <a:ea typeface="Cambria" panose="02040503050406030204" pitchFamily="18" charset="0"/>
                           </a:rPr>
                           <m:t>𝑗</m:t>
@@ -33362,8 +33362,8 @@
                         <m:sSub>
                           <m:sSubPr>
                             <m:ctrlPr>
-                              <a:rPr lang="en-US" sz="2400" smtClean="0">
-                                <a:latin typeface="Cambria" panose="02040503050406030204" pitchFamily="18" charset="0"/>
+                              <a:rPr lang="en-US" sz="2400" i="1" smtClean="0">
+                                <a:latin typeface="Cambria Math" panose="02040503050406030204" pitchFamily="18" charset="0"/>
                                 <a:ea typeface="Cambria" panose="02040503050406030204" pitchFamily="18" charset="0"/>
                               </a:rPr>
                             </m:ctrlPr>
@@ -33372,8 +33372,8 @@
                             <m:sSub>
                               <m:sSubPr>
                                 <m:ctrlPr>
-                                  <a:rPr lang="en-US" sz="2400" smtClean="0">
-                                    <a:latin typeface="Cambria" panose="02040503050406030204" pitchFamily="18" charset="0"/>
+                                  <a:rPr lang="en-US" sz="2400" i="1" smtClean="0">
+                                    <a:latin typeface="Cambria Math" panose="02040503050406030204" pitchFamily="18" charset="0"/>
                                     <a:ea typeface="Cambria" panose="02040503050406030204" pitchFamily="18" charset="0"/>
                                   </a:rPr>
                                 </m:ctrlPr>
@@ -33381,7 +33381,7 @@
                               <m:e>
                                 <m:r>
                                   <a:rPr lang="en-US" sz="2400" smtClean="0">
-                                    <a:latin typeface="Cambria" panose="02040503050406030204" pitchFamily="18" charset="0"/>
+                                    <a:latin typeface="Cambria Math" panose="02040503050406030204" pitchFamily="18" charset="0"/>
                                     <a:ea typeface="Cambria" panose="02040503050406030204" pitchFamily="18" charset="0"/>
                                   </a:rPr>
                                   <m:t>𝑎</m:t>
@@ -33390,7 +33390,7 @@
                               <m:sub>
                                 <m:r>
                                   <a:rPr lang="en-US" sz="2400" smtClean="0">
-                                    <a:latin typeface="Cambria" panose="02040503050406030204" pitchFamily="18" charset="0"/>
+                                    <a:latin typeface="Cambria Math" panose="02040503050406030204" pitchFamily="18" charset="0"/>
                                     <a:ea typeface="Cambria" panose="02040503050406030204" pitchFamily="18" charset="0"/>
                                   </a:rPr>
                                   <m:t>𝑖𝑗</m:t>
@@ -33399,7 +33399,7 @@
                             </m:sSub>
                             <m:r>
                               <a:rPr lang="en-US" sz="2400" smtClean="0">
-                                <a:latin typeface="Cambria" panose="02040503050406030204" pitchFamily="18" charset="0"/>
+                                <a:latin typeface="Cambria Math" panose="02040503050406030204" pitchFamily="18" charset="0"/>
                                 <a:ea typeface="Cambria" panose="02040503050406030204" pitchFamily="18" charset="0"/>
                               </a:rPr>
                               <m:t>𝑥</m:t>
@@ -33408,7 +33408,7 @@
                           <m:sub>
                             <m:r>
                               <a:rPr lang="en-US" sz="2400" smtClean="0">
-                                <a:latin typeface="Cambria" panose="02040503050406030204" pitchFamily="18" charset="0"/>
+                                <a:latin typeface="Cambria Math" panose="02040503050406030204" pitchFamily="18" charset="0"/>
                                 <a:ea typeface="Cambria" panose="02040503050406030204" pitchFamily="18" charset="0"/>
                               </a:rPr>
                               <m:t>𝑗</m:t>
@@ -33419,7 +33419,7 @@
                     </m:nary>
                     <m:r>
                       <a:rPr lang="en-US" sz="2400" smtClean="0">
-                        <a:latin typeface="Cambria" panose="02040503050406030204" pitchFamily="18" charset="0"/>
+                        <a:latin typeface="Cambria Math" panose="02040503050406030204" pitchFamily="18" charset="0"/>
                         <a:ea typeface="Cambria" panose="02040503050406030204" pitchFamily="18" charset="0"/>
                       </a:rPr>
                       <m:t>=1</m:t>
@@ -33540,7 +33540,7 @@
             </p:txBody>
           </p:sp>
         </mc:Choice>
-        <mc:Fallback>
+        <mc:Fallback xmlns="">
           <p:sp>
             <p:nvSpPr>
               <p:cNvPr id="2" name="Content Placeholder 1">
@@ -33731,7 +33731,7 @@
             <p:spPr/>
             <p:txBody>
               <a:bodyPr>
-                <a:normAutofit fontScale="85000" lnSpcReduction="10000"/>
+                <a:normAutofit fontScale="92500" lnSpcReduction="10000"/>
               </a:bodyPr>
               <a:lstStyle/>
               <a:p>
@@ -33972,7 +33972,7 @@
                 </a:pPr>
                 <a:r>
                   <a:rPr lang="en-US" dirty="0"/>
-                  <a:t>Let the optimal value be </a:t>
+                  <a:t>But let the optimal value be </a:t>
                 </a:r>
                 <a14:m>
                   <m:oMath xmlns:m="http://schemas.openxmlformats.org/officeDocument/2006/math">
@@ -34003,15 +34003,12 @@
                     </m:sSup>
                   </m:oMath>
                 </a14:m>
-                <a:r>
-                  <a:rPr lang="en-US" dirty="0"/>
-                  <a:t>.</a:t>
-                </a:r>
+                <a:endParaRPr lang="en-US" dirty="0"/>
               </a:p>
               <a:p>
                 <a:r>
                   <a:rPr lang="en-US" dirty="0"/>
-                  <a:t>Now, for any value </a:t>
+                  <a:t>For any value </a:t>
                 </a:r>
                 <a14:m>
                   <m:oMath xmlns:m="http://schemas.openxmlformats.org/officeDocument/2006/math">
@@ -34645,30 +34642,30 @@
               </a:p>
               <a:p>
                 <a:r>
-                  <a:rPr lang="en-US" sz="2300" dirty="0" err="1"/>
+                  <a:rPr lang="en-US" sz="1700" dirty="0" err="1"/>
                   <a:t>Dinkelbach</a:t>
                 </a:r>
                 <a:r>
-                  <a:rPr lang="en-US" sz="2300" dirty="0"/>
+                  <a:rPr lang="en-US" sz="1700" dirty="0"/>
                   <a:t>, W. (1967). </a:t>
                 </a:r>
                 <a:r>
-                  <a:rPr lang="en-US" sz="2300" b="1" dirty="0"/>
+                  <a:rPr lang="en-US" sz="1700" b="1" dirty="0"/>
                   <a:t>On nonlinear fractional programming</a:t>
                 </a:r>
                 <a:r>
-                  <a:rPr lang="en-US" sz="2300" dirty="0"/>
+                  <a:rPr lang="en-US" sz="1700" dirty="0"/>
                   <a:t>. </a:t>
                 </a:r>
                 <a:r>
-                  <a:rPr lang="en-US" sz="2300" i="1" dirty="0"/>
+                  <a:rPr lang="en-US" sz="1700" i="1" dirty="0"/>
                   <a:t>Management Science</a:t>
                 </a:r>
                 <a:r>
-                  <a:rPr lang="en-US" sz="2300" dirty="0"/>
+                  <a:rPr lang="en-US" sz="1700" dirty="0"/>
                   <a:t>, 13(7), 492–498.</a:t>
                 </a:r>
-                <a:endParaRPr lang="en-US" sz="4600" dirty="0"/>
+                <a:endParaRPr lang="en-US" sz="3500" dirty="0"/>
               </a:p>
             </p:txBody>
           </p:sp>
@@ -34694,7 +34691,7 @@
               <a:blipFill>
                 <a:blip r:embed="rId2"/>
                 <a:stretch>
-                  <a:fillRect l="-1070" t="-1624"/>
+                  <a:fillRect l="-1284" t="-1856"/>
                 </a:stretch>
               </a:blipFill>
             </p:spPr>
@@ -34875,7 +34872,7 @@
         </p:spPr>
         <p:txBody>
           <a:bodyPr>
-            <a:normAutofit/>
+            <a:normAutofit lnSpcReduction="10000"/>
           </a:bodyPr>
           <a:lstStyle/>
           <a:p>
@@ -34984,6 +34981,17 @@
             <a:r>
               <a:rPr lang="en-US" sz="2600" dirty="0"/>
               <a:t>.</a:t>
+            </a:r>
+          </a:p>
+          <a:p>
+            <a:pPr>
+              <a:lnSpc>
+                <a:spcPct val="120000"/>
+              </a:lnSpc>
+            </a:pPr>
+            <a:r>
+              <a:rPr lang="en-US" sz="2600" dirty="0"/>
+              <a:t>Forecasting models are autoregressive AR(1), ETS Holt-Winters, theta, random forest.</a:t>
             </a:r>
           </a:p>
           <a:p>

--- a/doc/IOCFC26/forecastSegmentation.pptx
+++ b/doc/IOCFC26/forecastSegmentation.pptx
@@ -32737,7 +32737,7 @@
             </a:r>
             <a:r>
               <a:rPr lang="it-IT" sz="2000" dirty="0" err="1"/>
-              <a:t>remains</a:t>
+              <a:t>is</a:t>
             </a:r>
             <a:r>
               <a:rPr lang="it-IT" sz="2000" dirty="0"/>
@@ -33965,47 +33965,6 @@
                 <a:endParaRPr lang="it-IT" dirty="0"/>
               </a:p>
               <a:p>
-                <a:pPr>
-                  <a:spcBef>
-                    <a:spcPts val="0"/>
-                  </a:spcBef>
-                </a:pPr>
-                <a:r>
-                  <a:rPr lang="en-US" dirty="0"/>
-                  <a:t>But let the optimal value be </a:t>
-                </a:r>
-                <a14:m>
-                  <m:oMath xmlns:m="http://schemas.openxmlformats.org/officeDocument/2006/math">
-                    <m:sSup>
-                      <m:sSupPr>
-                        <m:ctrlPr>
-                          <a:rPr lang="en-US" i="1" dirty="0" smtClean="0">
-                            <a:latin typeface="Cambria Math" panose="02040503050406030204" pitchFamily="18" charset="0"/>
-                          </a:rPr>
-                        </m:ctrlPr>
-                      </m:sSupPr>
-                      <m:e>
-                        <m:r>
-                          <a:rPr lang="it-IT" b="0" i="1" dirty="0" smtClean="0">
-                            <a:latin typeface="Cambria Math" panose="02040503050406030204" pitchFamily="18" charset="0"/>
-                          </a:rPr>
-                          <m:t>𝑧</m:t>
-                        </m:r>
-                      </m:e>
-                      <m:sup>
-                        <m:r>
-                          <a:rPr lang="en-US" i="1" dirty="0" smtClean="0">
-                            <a:latin typeface="Cambria Math" panose="02040503050406030204" pitchFamily="18" charset="0"/>
-                          </a:rPr>
-                          <m:t>∗</m:t>
-                        </m:r>
-                      </m:sup>
-                    </m:sSup>
-                  </m:oMath>
-                </a14:m>
-                <a:endParaRPr lang="en-US" dirty="0"/>
-              </a:p>
-              <a:p>
                 <a:r>
                   <a:rPr lang="en-US" dirty="0"/>
                   <a:t>For any value </a:t>
@@ -34089,7 +34048,7 @@
                 </a14:m>
                 <a:r>
                   <a:rPr lang="en-US" dirty="0"/>
-                  <a:t> if and only if </a:t>
+                  <a:t> becomes </a:t>
                 </a:r>
                 <a14:m>
                   <m:oMath xmlns:m="http://schemas.openxmlformats.org/officeDocument/2006/math">
@@ -34515,6 +34474,47 @@
                   <a:rPr lang="it-IT" dirty="0"/>
                   <a:t>, </a:t>
                 </a:r>
+              </a:p>
+              <a:p>
+                <a:pPr>
+                  <a:spcBef>
+                    <a:spcPts val="600"/>
+                  </a:spcBef>
+                </a:pPr>
+                <a:r>
+                  <a:rPr lang="en-US" dirty="0"/>
+                  <a:t>Let the optimal value be </a:t>
+                </a:r>
+                <a14:m>
+                  <m:oMath xmlns:m="http://schemas.openxmlformats.org/officeDocument/2006/math">
+                    <m:sSup>
+                      <m:sSupPr>
+                        <m:ctrlPr>
+                          <a:rPr lang="en-US" i="1" dirty="0">
+                            <a:latin typeface="Cambria Math" panose="02040503050406030204" pitchFamily="18" charset="0"/>
+                          </a:rPr>
+                        </m:ctrlPr>
+                      </m:sSupPr>
+                      <m:e>
+                        <m:r>
+                          <a:rPr lang="it-IT" i="1" dirty="0">
+                            <a:latin typeface="Cambria Math" panose="02040503050406030204" pitchFamily="18" charset="0"/>
+                          </a:rPr>
+                          <m:t>𝑧</m:t>
+                        </m:r>
+                      </m:e>
+                      <m:sup>
+                        <m:r>
+                          <a:rPr lang="en-US" i="1" dirty="0">
+                            <a:latin typeface="Cambria Math" panose="02040503050406030204" pitchFamily="18" charset="0"/>
+                          </a:rPr>
+                          <m:t>∗</m:t>
+                        </m:r>
+                      </m:sup>
+                    </m:sSup>
+                  </m:oMath>
+                </a14:m>
+                <a:endParaRPr lang="en-US" dirty="0"/>
               </a:p>
               <a:p>
                 <a:pPr>
